--- a/reports/答辩.pptx
+++ b/reports/答辩.pptx
@@ -17,6 +17,7 @@
     <p:sldId id="265" r:id="rId16"/>
     <p:sldId id="266" r:id="rId17"/>
     <p:sldId id="267" r:id="rId18"/>
+    <p:sldId id="268" r:id="rId19"/>
   </p:sldIdLst>
   <p:sldSz cx="12191695" cy="6858000" type="screen4x3"/>
   <p:notesSz cx="6858000" cy="9144000"/>
@@ -3250,7 +3251,7 @@
                 </a:solidFill>
                 <a:latin typeface="PingFang SC"/>
               </a:rPr>
-              <a:t>作者：【待填】　　2026-09-05</a:t>
+              <a:t>作者：【待填】　　2026-09-07</a:t>
             </a:r>
           </a:p>
         </p:txBody>
@@ -3354,7 +3355,7 @@
                 </a:solidFill>
                 <a:latin typeface="PingFang SC"/>
               </a:rPr>
-              <a:t>Demo「审言」</a:t>
+              <a:t>E4：口播 / 画面分路再并</a:t>
             </a:r>
           </a:p>
         </p:txBody>
@@ -3402,7 +3403,7 @@
                 </a:solidFill>
                 <a:latin typeface="PingFang SC"/>
               </a:rPr>
-              <a:t>python -m src.app  →  http://127.0.0.1:7860</a:t>
+              <a:t>合路 prompt 会淹没画面；10/20 互补在模态之间</a:t>
             </a:r>
           </a:p>
           <a:p>
@@ -3414,7 +3415,7 @@
                 </a:solidFill>
                 <a:latin typeface="PingFang SC"/>
               </a:rPr>
-              <a:t>上传视频或从测试集选择；三种模式可切换</a:t>
+              <a:t>E4 = 口播-only ∪ 画面-only ∪ E1，不改词表、不改少样本</a:t>
             </a:r>
           </a:p>
           <a:p>
@@ -3426,7 +3427,7 @@
                 </a:solidFill>
                 <a:latin typeface="PingFang SC"/>
               </a:rPr>
-              <a:t>展示口播、OCR、标签、证据、时间戳、法条、解释</a:t>
+              <a:t>micro F1 0.867 → 0.879；完全匹配 182 → 185；诱导消费召回 26/27</a:t>
             </a:r>
           </a:p>
           <a:p>
@@ -3438,7 +3439,19 @@
                 </a:solidFill>
                 <a:latin typeface="PingFang SC"/>
               </a:rPr>
-              <a:t>无登录、无爬取、无自动处罚</a:t>
+              <a:t>消融：只口播 0.577，只画面 0.663，都弱于合路 E2</a:t>
+            </a:r>
+          </a:p>
+          <a:p>
+            <a:pPr algn="l"/>
+            <a:r>
+              <a:rPr sz="2000">
+                <a:solidFill>
+                  <a:srgbClr val="222222"/>
+                </a:solidFill>
+                <a:latin typeface="PingFang SC"/>
+              </a:rPr>
+              <a:t>11 条新对、8 条新错；192 收益承诺仍漏</a:t>
             </a:r>
           </a:p>
         </p:txBody>
@@ -3542,7 +3555,7 @@
                 </a:solidFill>
                 <a:latin typeface="PingFang SC"/>
               </a:rPr>
-              <a:t>结论</a:t>
+              <a:t>Demo「审言」</a:t>
             </a:r>
           </a:p>
         </p:txBody>
@@ -3590,7 +3603,7 @@
                 </a:solidFill>
                 <a:latin typeface="PingFang SC"/>
               </a:rPr>
-              <a:t>画面叠字与口播必须一起审</a:t>
+              <a:t>python -m src.app  →  http://127.0.0.1:7860</a:t>
             </a:r>
           </a:p>
           <a:p>
@@ -3602,7 +3615,7 @@
                 </a:solidFill>
                 <a:latin typeface="PingFang SC"/>
               </a:rPr>
-              <a:t>规则保精确和可解释，模型补词表外断言</a:t>
+              <a:t>上传视频或从测试集选择；三种模式可切换</a:t>
             </a:r>
           </a:p>
           <a:p>
@@ -3614,7 +3627,7 @@
                 </a:solidFill>
                 <a:latin typeface="PingFang SC"/>
               </a:rPr>
-              <a:t>纪律内的并集是有效的一次改进</a:t>
+              <a:t>展示口播、OCR、标签、证据、时间戳、法条、解释</a:t>
             </a:r>
           </a:p>
           <a:p>
@@ -3626,7 +3639,7 @@
                 </a:solidFill>
                 <a:latin typeface="PingFang SC"/>
               </a:rPr>
-              <a:t>证据质量与标签同等重要；稀有类要靠复核说话</a:t>
+              <a:t>无登录、无爬取、无自动处罚</a:t>
             </a:r>
           </a:p>
         </p:txBody>
@@ -3708,6 +3721,206 @@
         </p:nvSpPr>
         <p:spPr>
           <a:xfrm>
+            <a:off x="640080" y="365760"/>
+            <a:ext cx="10972800" cy="548640"/>
+          </a:xfrm>
+          <a:prstGeom prst="rect">
+            <a:avLst/>
+          </a:prstGeom>
+          <a:noFill/>
+        </p:spPr>
+        <p:txBody>
+          <a:bodyPr wrap="square">
+            <a:spAutoFit/>
+          </a:bodyPr>
+          <a:lstStyle/>
+          <a:p>
+            <a:pPr algn="l"/>
+            <a:r>
+              <a:rPr sz="2800" b="1">
+                <a:solidFill>
+                  <a:srgbClr val="1F3A5F"/>
+                </a:solidFill>
+                <a:latin typeface="PingFang SC"/>
+              </a:rPr>
+              <a:t>结论</a:t>
+            </a:r>
+          </a:p>
+        </p:txBody>
+      </p:sp>
+      <p:sp>
+        <p:nvSpPr>
+          <p:cNvPr id="4" name="TextBox 3"/>
+          <p:cNvSpPr txBox="1"/>
+          <p:nvPr/>
+        </p:nvSpPr>
+        <p:spPr>
+          <a:xfrm>
+            <a:off x="731520" y="1188720"/>
+            <a:ext cx="10515600" cy="5029200"/>
+          </a:xfrm>
+          <a:prstGeom prst="rect">
+            <a:avLst/>
+          </a:prstGeom>
+          <a:noFill/>
+        </p:spPr>
+        <p:txBody>
+          <a:bodyPr wrap="square">
+            <a:spAutoFit/>
+          </a:bodyPr>
+          <a:lstStyle/>
+          <a:p>
+            <a:pPr algn="l"/>
+            <a:r>
+              <a:rPr sz="1800" b="0">
+                <a:solidFill>
+                  <a:srgbClr val="222222"/>
+                </a:solidFill>
+                <a:latin typeface="PingFang SC"/>
+              </a:rPr>
+              <a:t/>
+            </a:r>
+          </a:p>
+          <a:p/>
+          <a:p>
+            <a:pPr algn="l"/>
+            <a:r>
+              <a:rPr sz="2000">
+                <a:solidFill>
+                  <a:srgbClr val="222222"/>
+                </a:solidFill>
+                <a:latin typeface="PingFang SC"/>
+              </a:rPr>
+              <a:t>画面叠字与口播必须一起审</a:t>
+            </a:r>
+          </a:p>
+          <a:p>
+            <a:pPr algn="l"/>
+            <a:r>
+              <a:rPr sz="2000">
+                <a:solidFill>
+                  <a:srgbClr val="222222"/>
+                </a:solidFill>
+                <a:latin typeface="PingFang SC"/>
+              </a:rPr>
+              <a:t>规则保精确和可解释，模型补词表外断言</a:t>
+            </a:r>
+          </a:p>
+          <a:p>
+            <a:pPr algn="l"/>
+            <a:r>
+              <a:rPr sz="2000">
+                <a:solidFill>
+                  <a:srgbClr val="222222"/>
+                </a:solidFill>
+                <a:latin typeface="PingFang SC"/>
+              </a:rPr>
+              <a:t>纪律内的并集是有效的一次改进；分路还能再补促销召回</a:t>
+            </a:r>
+          </a:p>
+          <a:p>
+            <a:pPr algn="l"/>
+            <a:r>
+              <a:rPr sz="2000">
+                <a:solidFill>
+                  <a:srgbClr val="222222"/>
+                </a:solidFill>
+                <a:latin typeface="PingFang SC"/>
+              </a:rPr>
+              <a:t>单看口播或单看画面都不够，增益来自拆开后再并</a:t>
+            </a:r>
+          </a:p>
+          <a:p>
+            <a:pPr algn="l"/>
+            <a:r>
+              <a:rPr sz="2000">
+                <a:solidFill>
+                  <a:srgbClr val="222222"/>
+                </a:solidFill>
+                <a:latin typeface="PingFang SC"/>
+              </a:rPr>
+              <a:t>证据质量与标签同等重要；稀有类要靠复核说话</a:t>
+            </a:r>
+          </a:p>
+        </p:txBody>
+      </p:sp>
+    </p:spTree>
+  </p:cSld>
+  <p:clrMapOvr>
+    <a:masterClrMapping/>
+  </p:clrMapOvr>
+</p:sld>
+</file>
+
+<file path=ppt/slides/slide13.xml><?xml version="1.0" encoding="utf-8"?>
+<p:sld xmlns:a="http://schemas.openxmlformats.org/drawingml/2006/main" xmlns:p="http://schemas.openxmlformats.org/presentationml/2006/main" xmlns:r="http://schemas.openxmlformats.org/officeDocument/2006/relationships">
+  <p:cSld>
+    <p:bg>
+      <p:bgPr>
+        <a:solidFill>
+          <a:srgbClr val="F7F4EE"/>
+        </a:solidFill>
+        <a:effectLst/>
+      </p:bgPr>
+    </p:bg>
+    <p:spTree>
+      <p:nvGrpSpPr>
+        <p:cNvPr id="1" name=""/>
+        <p:cNvGrpSpPr/>
+        <p:nvPr/>
+      </p:nvGrpSpPr>
+      <p:grpSpPr/>
+      <p:sp>
+        <p:nvSpPr>
+          <p:cNvPr id="2" name="Rectangle 1"/>
+          <p:cNvSpPr/>
+          <p:nvPr/>
+        </p:nvSpPr>
+        <p:spPr>
+          <a:xfrm>
+            <a:off x="0" y="0"/>
+            <a:ext cx="12191695" cy="109728"/>
+          </a:xfrm>
+          <a:prstGeom prst="rect">
+            <a:avLst/>
+          </a:prstGeom>
+          <a:solidFill>
+            <a:srgbClr val="2A6F6F"/>
+          </a:solidFill>
+          <a:ln>
+            <a:noFill/>
+          </a:ln>
+        </p:spPr>
+        <p:style>
+          <a:lnRef idx="1">
+            <a:schemeClr val="accent1"/>
+          </a:lnRef>
+          <a:fillRef idx="3">
+            <a:schemeClr val="accent1"/>
+          </a:fillRef>
+          <a:effectRef idx="2">
+            <a:schemeClr val="accent1"/>
+          </a:effectRef>
+          <a:fontRef idx="minor">
+            <a:schemeClr val="lt1"/>
+          </a:fontRef>
+        </p:style>
+        <p:txBody>
+          <a:bodyPr rtlCol="0" anchor="ctr"/>
+          <a:lstStyle/>
+          <a:p>
+            <a:pPr algn="ctr"/>
+          </a:p>
+        </p:txBody>
+      </p:sp>
+      <p:sp>
+        <p:nvSpPr>
+          <p:cNvPr id="3" name="TextBox 2"/>
+          <p:cNvSpPr txBox="1"/>
+          <p:nvPr/>
+        </p:nvSpPr>
+        <p:spPr>
+          <a:xfrm>
             <a:off x="640080" y="2194560"/>
             <a:ext cx="10972800" cy="914400"/>
           </a:xfrm>
@@ -3965,7 +4178,7 @@
                 </a:solidFill>
                 <a:latin typeface="PingFang SC"/>
               </a:rPr>
-              <a:t>标签：正常 / 夸大功效 / 虚假收益 / 诱导消费 / 站外导流 / 其他线索 / 无法判断</a:t>
+              <a:t>标签：正常 / 夸大功效 / 虚假收益 / 诱导消费 / 站外导流 / 其他线索</a:t>
             </a:r>
           </a:p>
         </p:txBody>
@@ -4129,7 +4342,7 @@
                 </a:solidFill>
                 <a:latin typeface="PingFang SC"/>
               </a:rPr>
-              <a:t>夸大功效195，诱导消费27，正常32，多标签20</a:t>
+              <a:t>夸大功效195，诱导消费27，正常33，多标签20</a:t>
             </a:r>
           </a:p>
           <a:p>
@@ -4141,7 +4354,7 @@
                 </a:solidFill>
                 <a:latin typeface="PingFang SC"/>
               </a:rPr>
-              <a:t>收益承诺、其他线索、无法判断各1条；站外导流支持为0</a:t>
+              <a:t>收益承诺、其他线索各1条；站外导流支持为0</a:t>
             </a:r>
           </a:p>
           <a:p>
@@ -4505,7 +4718,7 @@
                 </a:solidFill>
                 <a:latin typeface="PingFang SC"/>
               </a:rPr>
-              <a:t>micro P/R/F1 = 0.948 / 0.246 / 0.390，完全匹配72/237</a:t>
+              <a:t>micro P/R/F1 = 0.966 / 0.643 / 0.772，完全匹配157/237</a:t>
             </a:r>
           </a:p>
           <a:p>
@@ -4517,7 +4730,7 @@
                 </a:solidFill>
                 <a:latin typeface="PingFang SC"/>
               </a:rPr>
-              <a:t>诱导消费稳（F1 0.773），夸大功效召回低（F1 0.322）</a:t>
+              <a:t>诱导消费 F1 0.773，夸大功效 F1 0.777</a:t>
             </a:r>
           </a:p>
           <a:p>
@@ -4529,7 +4742,7 @@
                 </a:solidFill>
                 <a:latin typeface="PingFang SC"/>
               </a:rPr>
-              <a:t>有条件描述附近命中改为无法判断；无命中≠人工认定安全</a:t>
+              <a:t>有条件描述附近命中不标风险；无命中≠人工认定安全</a:t>
             </a:r>
           </a:p>
         </p:txBody>
@@ -4705,7 +4918,7 @@
                 </a:solidFill>
                 <a:latin typeface="PingFang SC"/>
               </a:rPr>
-              <a:t>micro P/R/F1 = 0.880 / 0.362 / 0.513，完全匹配89/237</a:t>
+              <a:t>micro P/R/F1 = 0.907 / 0.612 / 0.731，完全匹配138/237</a:t>
             </a:r>
           </a:p>
           <a:p>
@@ -4881,7 +5094,7 @@
                 </a:solidFill>
                 <a:latin typeface="PingFang SC"/>
               </a:rPr>
-              <a:t>micro F1：0.390 → 0.513 → 0.612</a:t>
+              <a:t>E1 0.772，E2 0.731，并集后 0.867</a:t>
             </a:r>
           </a:p>
           <a:p>
@@ -4893,7 +5106,7 @@
                 </a:solidFill>
                 <a:latin typeface="PingFang SC"/>
               </a:rPr>
-              <a:t>诱导消费 F1：0.773 / 0.619 → 0.885（召回0.852）</a:t>
+              <a:t>诱导消费 F1：0.773 / 0.735 → 0.873</a:t>
             </a:r>
           </a:p>
           <a:p>
@@ -4905,7 +5118,7 @@
                 </a:solidFill>
                 <a:latin typeface="PingFang SC"/>
               </a:rPr>
-              <a:t>夸大功效 F1：0.322 / 0.495 → 0.561；完全匹配106/237</a:t>
+              <a:t>夸大功效 F1：0.777 / 0.731 → 0.867；完全匹配182/237</a:t>
             </a:r>
           </a:p>
         </p:txBody>
@@ -5069,7 +5282,7 @@
                 </a:solidFill>
                 <a:latin typeface="PingFang SC"/>
               </a:rPr>
-              <a:t>E1、E2各有16条需要修改，但错因不同</a:t>
+              <a:t>E1有15条、E2有16条需要修改，但错因不同</a:t>
             </a:r>
           </a:p>
           <a:p>
@@ -5269,7 +5482,7 @@
                 </a:solidFill>
                 <a:latin typeface="PingFang SC"/>
               </a:rPr>
-              <a:t>192：画面有“只谈收益/国内首个”，词表与模型都漏</a:t>
+              <a:t>192：规则打“首个”；“只谈收益”不标收益承诺</a:t>
             </a:r>
           </a:p>
           <a:p>
